--- a/paper/LSTM.pptx
+++ b/paper/LSTM.pptx
@@ -6,7 +6,6 @@
   </p:sldMasterIdLst>
   <p:sldIdLst>
     <p:sldId id="256" r:id="rId2"/>
-    <p:sldId id="257" r:id="rId3"/>
   </p:sldIdLst>
   <p:sldSz cx="12192000" cy="6858000"/>
   <p:notesSz cx="6858000" cy="9144000"/>
@@ -262,7 +261,7 @@
           <a:p>
             <a:fld id="{0FEF0383-B892-43A7-8E80-74A67C740698}" type="datetimeFigureOut">
               <a:rPr lang="en-GB" smtClean="0"/>
-              <a:t>19/09/2023</a:t>
+              <a:t>11/05/2026</a:t>
             </a:fld>
             <a:endParaRPr lang="en-GB"/>
           </a:p>
@@ -316,7 +315,7 @@
           <a:p>
             <a:fld id="{4F9BD2FC-0E27-482E-A5A7-B8936B6B1129}" type="slidenum">
               <a:rPr lang="en-GB" smtClean="0"/>
-              <a:t>‹Nº›</a:t>
+              <a:t>‹#›</a:t>
             </a:fld>
             <a:endParaRPr lang="en-GB"/>
           </a:p>
@@ -462,7 +461,7 @@
           <a:p>
             <a:fld id="{0FEF0383-B892-43A7-8E80-74A67C740698}" type="datetimeFigureOut">
               <a:rPr lang="en-GB" smtClean="0"/>
-              <a:t>19/09/2023</a:t>
+              <a:t>11/05/2026</a:t>
             </a:fld>
             <a:endParaRPr lang="en-GB"/>
           </a:p>
@@ -516,7 +515,7 @@
           <a:p>
             <a:fld id="{4F9BD2FC-0E27-482E-A5A7-B8936B6B1129}" type="slidenum">
               <a:rPr lang="en-GB" smtClean="0"/>
-              <a:t>‹Nº›</a:t>
+              <a:t>‹#›</a:t>
             </a:fld>
             <a:endParaRPr lang="en-GB"/>
           </a:p>
@@ -672,7 +671,7 @@
           <a:p>
             <a:fld id="{0FEF0383-B892-43A7-8E80-74A67C740698}" type="datetimeFigureOut">
               <a:rPr lang="en-GB" smtClean="0"/>
-              <a:t>19/09/2023</a:t>
+              <a:t>11/05/2026</a:t>
             </a:fld>
             <a:endParaRPr lang="en-GB"/>
           </a:p>
@@ -726,7 +725,7 @@
           <a:p>
             <a:fld id="{4F9BD2FC-0E27-482E-A5A7-B8936B6B1129}" type="slidenum">
               <a:rPr lang="en-GB" smtClean="0"/>
-              <a:t>‹Nº›</a:t>
+              <a:t>‹#›</a:t>
             </a:fld>
             <a:endParaRPr lang="en-GB"/>
           </a:p>
@@ -872,7 +871,7 @@
           <a:p>
             <a:fld id="{0FEF0383-B892-43A7-8E80-74A67C740698}" type="datetimeFigureOut">
               <a:rPr lang="en-GB" smtClean="0"/>
-              <a:t>19/09/2023</a:t>
+              <a:t>11/05/2026</a:t>
             </a:fld>
             <a:endParaRPr lang="en-GB"/>
           </a:p>
@@ -926,7 +925,7 @@
           <a:p>
             <a:fld id="{4F9BD2FC-0E27-482E-A5A7-B8936B6B1129}" type="slidenum">
               <a:rPr lang="en-GB" smtClean="0"/>
-              <a:t>‹Nº›</a:t>
+              <a:t>‹#›</a:t>
             </a:fld>
             <a:endParaRPr lang="en-GB"/>
           </a:p>
@@ -1148,7 +1147,7 @@
           <a:p>
             <a:fld id="{0FEF0383-B892-43A7-8E80-74A67C740698}" type="datetimeFigureOut">
               <a:rPr lang="en-GB" smtClean="0"/>
-              <a:t>19/09/2023</a:t>
+              <a:t>11/05/2026</a:t>
             </a:fld>
             <a:endParaRPr lang="en-GB"/>
           </a:p>
@@ -1202,7 +1201,7 @@
           <a:p>
             <a:fld id="{4F9BD2FC-0E27-482E-A5A7-B8936B6B1129}" type="slidenum">
               <a:rPr lang="en-GB" smtClean="0"/>
-              <a:t>‹Nº›</a:t>
+              <a:t>‹#›</a:t>
             </a:fld>
             <a:endParaRPr lang="en-GB"/>
           </a:p>
@@ -1416,7 +1415,7 @@
           <a:p>
             <a:fld id="{0FEF0383-B892-43A7-8E80-74A67C740698}" type="datetimeFigureOut">
               <a:rPr lang="en-GB" smtClean="0"/>
-              <a:t>19/09/2023</a:t>
+              <a:t>11/05/2026</a:t>
             </a:fld>
             <a:endParaRPr lang="en-GB"/>
           </a:p>
@@ -1470,7 +1469,7 @@
           <a:p>
             <a:fld id="{4F9BD2FC-0E27-482E-A5A7-B8936B6B1129}" type="slidenum">
               <a:rPr lang="en-GB" smtClean="0"/>
-              <a:t>‹Nº›</a:t>
+              <a:t>‹#›</a:t>
             </a:fld>
             <a:endParaRPr lang="en-GB"/>
           </a:p>
@@ -1831,7 +1830,7 @@
           <a:p>
             <a:fld id="{0FEF0383-B892-43A7-8E80-74A67C740698}" type="datetimeFigureOut">
               <a:rPr lang="en-GB" smtClean="0"/>
-              <a:t>19/09/2023</a:t>
+              <a:t>11/05/2026</a:t>
             </a:fld>
             <a:endParaRPr lang="en-GB"/>
           </a:p>
@@ -1885,7 +1884,7 @@
           <a:p>
             <a:fld id="{4F9BD2FC-0E27-482E-A5A7-B8936B6B1129}" type="slidenum">
               <a:rPr lang="en-GB" smtClean="0"/>
-              <a:t>‹Nº›</a:t>
+              <a:t>‹#›</a:t>
             </a:fld>
             <a:endParaRPr lang="en-GB"/>
           </a:p>
@@ -1973,7 +1972,7 @@
           <a:p>
             <a:fld id="{0FEF0383-B892-43A7-8E80-74A67C740698}" type="datetimeFigureOut">
               <a:rPr lang="en-GB" smtClean="0"/>
-              <a:t>19/09/2023</a:t>
+              <a:t>11/05/2026</a:t>
             </a:fld>
             <a:endParaRPr lang="en-GB"/>
           </a:p>
@@ -2027,7 +2026,7 @@
           <a:p>
             <a:fld id="{4F9BD2FC-0E27-482E-A5A7-B8936B6B1129}" type="slidenum">
               <a:rPr lang="en-GB" smtClean="0"/>
-              <a:t>‹Nº›</a:t>
+              <a:t>‹#›</a:t>
             </a:fld>
             <a:endParaRPr lang="en-GB"/>
           </a:p>
@@ -2086,7 +2085,7 @@
           <a:p>
             <a:fld id="{0FEF0383-B892-43A7-8E80-74A67C740698}" type="datetimeFigureOut">
               <a:rPr lang="en-GB" smtClean="0"/>
-              <a:t>19/09/2023</a:t>
+              <a:t>11/05/2026</a:t>
             </a:fld>
             <a:endParaRPr lang="en-GB"/>
           </a:p>
@@ -2140,7 +2139,7 @@
           <a:p>
             <a:fld id="{4F9BD2FC-0E27-482E-A5A7-B8936B6B1129}" type="slidenum">
               <a:rPr lang="en-GB" smtClean="0"/>
-              <a:t>‹Nº›</a:t>
+              <a:t>‹#›</a:t>
             </a:fld>
             <a:endParaRPr lang="en-GB"/>
           </a:p>
@@ -2399,7 +2398,7 @@
           <a:p>
             <a:fld id="{0FEF0383-B892-43A7-8E80-74A67C740698}" type="datetimeFigureOut">
               <a:rPr lang="en-GB" smtClean="0"/>
-              <a:t>19/09/2023</a:t>
+              <a:t>11/05/2026</a:t>
             </a:fld>
             <a:endParaRPr lang="en-GB"/>
           </a:p>
@@ -2453,7 +2452,7 @@
           <a:p>
             <a:fld id="{4F9BD2FC-0E27-482E-A5A7-B8936B6B1129}" type="slidenum">
               <a:rPr lang="en-GB" smtClean="0"/>
-              <a:t>‹Nº›</a:t>
+              <a:t>‹#›</a:t>
             </a:fld>
             <a:endParaRPr lang="en-GB"/>
           </a:p>
@@ -2688,7 +2687,7 @@
           <a:p>
             <a:fld id="{0FEF0383-B892-43A7-8E80-74A67C740698}" type="datetimeFigureOut">
               <a:rPr lang="en-GB" smtClean="0"/>
-              <a:t>19/09/2023</a:t>
+              <a:t>11/05/2026</a:t>
             </a:fld>
             <a:endParaRPr lang="en-GB"/>
           </a:p>
@@ -2742,7 +2741,7 @@
           <a:p>
             <a:fld id="{4F9BD2FC-0E27-482E-A5A7-B8936B6B1129}" type="slidenum">
               <a:rPr lang="en-GB" smtClean="0"/>
-              <a:t>‹Nº›</a:t>
+              <a:t>‹#›</a:t>
             </a:fld>
             <a:endParaRPr lang="en-GB"/>
           </a:p>
@@ -2931,7 +2930,7 @@
           <a:p>
             <a:fld id="{0FEF0383-B892-43A7-8E80-74A67C740698}" type="datetimeFigureOut">
               <a:rPr lang="en-GB" smtClean="0"/>
-              <a:t>19/09/2023</a:t>
+              <a:t>11/05/2026</a:t>
             </a:fld>
             <a:endParaRPr lang="en-GB"/>
           </a:p>
@@ -3021,7 +3020,7 @@
           <a:p>
             <a:fld id="{4F9BD2FC-0E27-482E-A5A7-B8936B6B1129}" type="slidenum">
               <a:rPr lang="en-GB" smtClean="0"/>
-              <a:t>‹Nº›</a:t>
+              <a:t>‹#›</a:t>
             </a:fld>
             <a:endParaRPr lang="en-GB"/>
           </a:p>
@@ -3362,7 +3361,7 @@
         </p:nvSpPr>
         <p:spPr>
           <a:xfrm>
-            <a:off x="3205240" y="1255199"/>
+            <a:off x="3205240" y="1255200"/>
             <a:ext cx="5040000" cy="4320000"/>
           </a:xfrm>
           <a:prstGeom prst="roundRect">
@@ -3945,7 +3944,7 @@
           <a:p>
             <a:pPr algn="ctr"/>
             <a:r>
-              <a:rPr lang="es-ES" sz="2200" dirty="0" err="1">
+              <a:rPr lang="es-ES" sz="2200" dirty="0">
                 <a:solidFill>
                   <a:schemeClr val="tx1"/>
                 </a:solidFill>
@@ -3953,7 +3952,7 @@
               <a:t>C</a:t>
             </a:r>
             <a:r>
-              <a:rPr lang="es-ES" sz="2200" baseline="-25000" dirty="0" err="1">
+              <a:rPr lang="es-ES" sz="2200" baseline="-25000" dirty="0">
                 <a:solidFill>
                   <a:schemeClr val="tx1"/>
                 </a:solidFill>
@@ -4135,7 +4134,7 @@
           <a:p>
             <a:pPr algn="ctr"/>
             <a:r>
-              <a:rPr lang="es-ES" sz="2200" dirty="0" err="1">
+              <a:rPr lang="es-ES" sz="2200" dirty="0">
                 <a:solidFill>
                   <a:schemeClr val="tx1"/>
                 </a:solidFill>
@@ -4143,7 +4142,7 @@
               <a:t>h</a:t>
             </a:r>
             <a:r>
-              <a:rPr lang="es-ES" sz="2200" baseline="-25000" dirty="0" err="1">
+              <a:rPr lang="es-ES" sz="2200" baseline="-25000" dirty="0">
                 <a:solidFill>
                   <a:schemeClr val="tx1"/>
                 </a:solidFill>
@@ -4303,7 +4302,7 @@
           <a:p>
             <a:pPr algn="ctr"/>
             <a:r>
-              <a:rPr lang="es-ES" sz="2200" dirty="0" err="1">
+              <a:rPr lang="es-ES" sz="2200" dirty="0">
                 <a:solidFill>
                   <a:schemeClr val="tx1"/>
                 </a:solidFill>
@@ -4311,7 +4310,7 @@
               <a:t>X</a:t>
             </a:r>
             <a:r>
-              <a:rPr lang="es-ES" sz="2200" baseline="-25000" dirty="0" err="1">
+              <a:rPr lang="es-ES" sz="2200" baseline="-25000" dirty="0">
                 <a:solidFill>
                   <a:schemeClr val="tx1"/>
                 </a:solidFill>
@@ -4375,7 +4374,7 @@
           <a:p>
             <a:pPr algn="ctr"/>
             <a:r>
-              <a:rPr lang="es-ES" sz="2200" dirty="0" err="1">
+              <a:rPr lang="es-ES" sz="2200" dirty="0">
                 <a:solidFill>
                   <a:schemeClr val="tx1"/>
                 </a:solidFill>
@@ -4383,7 +4382,7 @@
               <a:t>h</a:t>
             </a:r>
             <a:r>
-              <a:rPr lang="es-ES" sz="2200" baseline="-25000" dirty="0" err="1">
+              <a:rPr lang="es-ES" sz="2200" baseline="-25000" dirty="0">
                 <a:solidFill>
                   <a:schemeClr val="tx1"/>
                 </a:solidFill>
@@ -4822,18 +4821,13 @@
           <a:p>
             <a:pPr algn="ctr"/>
             <a:r>
-              <a:rPr lang="es-ES" sz="2200" dirty="0" err="1">
+              <a:rPr lang="en-US" sz="2200" dirty="0">
                 <a:solidFill>
                   <a:schemeClr val="tx1"/>
                 </a:solidFill>
               </a:rPr>
               <a:t>tanh</a:t>
             </a:r>
-            <a:endParaRPr lang="en-GB" sz="2200" dirty="0">
-              <a:solidFill>
-                <a:schemeClr val="tx1"/>
-              </a:solidFill>
-            </a:endParaRPr>
           </a:p>
         </p:txBody>
       </p:sp>
@@ -4960,7 +4954,7 @@
           <a:p>
             <a:pPr algn="ctr"/>
             <a:r>
-              <a:rPr lang="es-ES" sz="2200" dirty="0" err="1">
+              <a:rPr lang="es-ES" sz="2200" dirty="0">
                 <a:solidFill>
                   <a:schemeClr val="tx1"/>
                 </a:solidFill>
@@ -5991,7 +5985,7 @@
           <a:lstStyle/>
           <a:p>
             <a:r>
-              <a:rPr lang="es-ES" dirty="0" err="1">
+              <a:rPr lang="en-US" dirty="0">
                 <a:solidFill>
                   <a:schemeClr val="accent4">
                     <a:lumMod val="75000"/>
@@ -5999,83 +5993,6 @@
                 </a:solidFill>
               </a:rPr>
               <a:t>forget</a:t>
-            </a:r>
-            <a:r>
-              <a:rPr lang="es-ES" dirty="0">
-                <a:solidFill>
-                  <a:schemeClr val="accent4">
-                    <a:lumMod val="75000"/>
-                  </a:schemeClr>
-                </a:solidFill>
-              </a:rPr>
-              <a:t> gate</a:t>
-            </a:r>
-            <a:endParaRPr lang="en-GB" dirty="0">
-              <a:solidFill>
-                <a:schemeClr val="accent4">
-                  <a:lumMod val="75000"/>
-                </a:schemeClr>
-              </a:solidFill>
-            </a:endParaRPr>
-          </a:p>
-        </p:txBody>
-      </p:sp>
-      <p:sp>
-        <p:nvSpPr>
-          <p:cNvPr id="34" name="Globo: línea doblada sin borde 33">
-            <a:extLst>
-              <a:ext uri="{FF2B5EF4-FFF2-40B4-BE49-F238E27FC236}">
-                <a16:creationId xmlns:a16="http://schemas.microsoft.com/office/drawing/2014/main" id="{10933BB0-5CC1-0EF9-3459-B51E06AEB8FE}"/>
-              </a:ext>
-            </a:extLst>
-          </p:cNvPr>
-          <p:cNvSpPr/>
-          <p:nvPr/>
-        </p:nvSpPr>
-        <p:spPr>
-          <a:xfrm>
-            <a:off x="6911079" y="461753"/>
-            <a:ext cx="1239670" cy="446089"/>
-          </a:xfrm>
-          <a:noFill/>
-          <a:ln>
-            <a:solidFill>
-              <a:schemeClr val="accent4">
-                <a:lumMod val="75000"/>
-              </a:schemeClr>
-            </a:solidFill>
-            <a:tailEnd type="stealth" w="med" len="lg"/>
-          </a:ln>
-        </p:spPr>
-        <p:style>
-          <a:lnRef idx="2">
-            <a:schemeClr val="accent1">
-              <a:shade val="15000"/>
-            </a:schemeClr>
-          </a:lnRef>
-          <a:fillRef idx="1">
-            <a:schemeClr val="accent1"/>
-          </a:fillRef>
-          <a:effectRef idx="0">
-            <a:schemeClr val="accent1"/>
-          </a:effectRef>
-          <a:fontRef idx="minor">
-            <a:schemeClr val="lt1"/>
-          </a:fontRef>
-        </p:style>
-        <p:txBody>
-          <a:bodyPr lIns="36000" tIns="36000" rIns="36000" bIns="36000" rtlCol="0" anchor="ctr"/>
-          <a:lstStyle/>
-          <a:p>
-            <a:r>
-              <a:rPr lang="es-ES" dirty="0" err="1">
-                <a:solidFill>
-                  <a:schemeClr val="accent4">
-                    <a:lumMod val="75000"/>
-                  </a:schemeClr>
-                </a:solidFill>
-              </a:rPr>
-              <a:t>remember</a:t>
             </a:r>
             <a:r>
               <a:rPr lang="es-ES" dirty="0">
@@ -6463,7 +6380,7 @@
           <a:p>
             <a:pPr algn="r"/>
             <a:r>
-              <a:rPr lang="es-ES" dirty="0" err="1">
+              <a:rPr lang="en-US" dirty="0">
                 <a:solidFill>
                   <a:schemeClr val="accent4">
                     <a:lumMod val="75000"/>
@@ -6492,42 +6409,12 @@
           </a:p>
         </p:txBody>
       </p:sp>
-    </p:spTree>
-    <p:extLst>
-      <p:ext uri="{BB962C8B-B14F-4D97-AF65-F5344CB8AC3E}">
-        <p14:creationId xmlns:p14="http://schemas.microsoft.com/office/powerpoint/2010/main" val="3684884756"/>
-      </p:ext>
-    </p:extLst>
-  </p:cSld>
-  <p:clrMapOvr>
-    <a:masterClrMapping/>
-  </p:clrMapOvr>
-</p:sld>
-</file>
-
-<file path=ppt/slides/slide2.xml><?xml version="1.0" encoding="utf-8"?>
-<p:sld xmlns:a="http://schemas.openxmlformats.org/drawingml/2006/main" xmlns:r="http://schemas.openxmlformats.org/officeDocument/2006/relationships" xmlns:p="http://schemas.openxmlformats.org/presentationml/2006/main">
-  <p:cSld>
-    <p:spTree>
-      <p:nvGrpSpPr>
-        <p:cNvPr id="1" name=""/>
-        <p:cNvGrpSpPr/>
-        <p:nvPr/>
-      </p:nvGrpSpPr>
-      <p:grpSpPr>
-        <a:xfrm>
-          <a:off x="0" y="0"/>
-          <a:ext cx="0" cy="0"/>
-          <a:chOff x="0" y="0"/>
-          <a:chExt cx="0" cy="0"/>
-        </a:xfrm>
-      </p:grpSpPr>
-      <p:sp>
-        <p:nvSpPr>
-          <p:cNvPr id="34" name="Globo: línea doblada sin borde 33">
-            <a:extLst>
-              <a:ext uri="{FF2B5EF4-FFF2-40B4-BE49-F238E27FC236}">
-                <a16:creationId xmlns:a16="http://schemas.microsoft.com/office/drawing/2014/main" id="{10933BB0-5CC1-0EF9-3459-B51E06AEB8FE}"/>
+      <p:sp>
+        <p:nvSpPr>
+          <p:cNvPr id="2" name="Globo: línea doblada sin borde 30">
+            <a:extLst>
+              <a:ext uri="{FF2B5EF4-FFF2-40B4-BE49-F238E27FC236}">
+                <a16:creationId xmlns:a16="http://schemas.microsoft.com/office/drawing/2014/main" id="{9B0D826C-7284-19FD-5825-CC9112932941}"/>
               </a:ext>
             </a:extLst>
           </p:cNvPr>
@@ -6536,9 +6423,110 @@
         </p:nvSpPr>
         <p:spPr>
           <a:xfrm>
-            <a:off x="6911079" y="461753"/>
-            <a:ext cx="1239670" cy="446089"/>
+            <a:off x="6877119" y="478949"/>
+            <a:ext cx="1088870" cy="446089"/>
           </a:xfrm>
+          <a:custGeom>
+            <a:avLst/>
+            <a:gdLst>
+              <a:gd name="connsiteX0" fmla="*/ 0 w 1088870"/>
+              <a:gd name="connsiteY0" fmla="*/ 0 h 446089"/>
+              <a:gd name="connsiteX1" fmla="*/ 533546 w 1088870"/>
+              <a:gd name="connsiteY1" fmla="*/ 0 h 446089"/>
+              <a:gd name="connsiteX2" fmla="*/ 1088870 w 1088870"/>
+              <a:gd name="connsiteY2" fmla="*/ 0 h 446089"/>
+              <a:gd name="connsiteX3" fmla="*/ 1088870 w 1088870"/>
+              <a:gd name="connsiteY3" fmla="*/ 446089 h 446089"/>
+              <a:gd name="connsiteX4" fmla="*/ 566212 w 1088870"/>
+              <a:gd name="connsiteY4" fmla="*/ 446089 h 446089"/>
+              <a:gd name="connsiteX5" fmla="*/ 0 w 1088870"/>
+              <a:gd name="connsiteY5" fmla="*/ 446089 h 446089"/>
+              <a:gd name="connsiteX6" fmla="*/ 0 w 1088870"/>
+              <a:gd name="connsiteY6" fmla="*/ 0 h 446089"/>
+              <a:gd name="connsiteX0" fmla="*/ -90736 w 1088870"/>
+              <a:gd name="connsiteY0" fmla="*/ 83642 h 446089"/>
+              <a:gd name="connsiteX1" fmla="*/ -181482 w 1088870"/>
+              <a:gd name="connsiteY1" fmla="*/ 83642 h 446089"/>
+              <a:gd name="connsiteX2" fmla="*/ -536106 w 1088870"/>
+              <a:gd name="connsiteY2" fmla="*/ 676777 h 446089"/>
+              <a:gd name="connsiteX3" fmla="*/ -863452 w 1088870"/>
+              <a:gd name="connsiteY3" fmla="*/ 1224287 h 446089"/>
+            </a:gdLst>
+            <a:ahLst/>
+            <a:cxnLst>
+              <a:cxn ang="0">
+                <a:pos x="connsiteX0" y="connsiteY0"/>
+              </a:cxn>
+              <a:cxn ang="0">
+                <a:pos x="connsiteX1" y="connsiteY1"/>
+              </a:cxn>
+              <a:cxn ang="0">
+                <a:pos x="connsiteX2" y="connsiteY2"/>
+              </a:cxn>
+              <a:cxn ang="0">
+                <a:pos x="connsiteX3" y="connsiteY3"/>
+              </a:cxn>
+            </a:cxnLst>
+            <a:rect l="l" t="t" r="r" b="b"/>
+            <a:pathLst>
+              <a:path w="1088870" h="446089" stroke="0" extrusionOk="0">
+                <a:moveTo>
+                  <a:pt x="0" y="0"/>
+                </a:moveTo>
+                <a:cubicBezTo>
+                  <a:pt x="125384" y="-327"/>
+                  <a:pt x="404854" y="-20576"/>
+                  <a:pt x="533546" y="0"/>
+                </a:cubicBezTo>
+                <a:cubicBezTo>
+                  <a:pt x="662238" y="20576"/>
+                  <a:pt x="825457" y="-19361"/>
+                  <a:pt x="1088870" y="0"/>
+                </a:cubicBezTo>
+                <a:cubicBezTo>
+                  <a:pt x="1068569" y="164532"/>
+                  <a:pt x="1093280" y="235631"/>
+                  <a:pt x="1088870" y="446089"/>
+                </a:cubicBezTo>
+                <a:cubicBezTo>
+                  <a:pt x="919784" y="420168"/>
+                  <a:pt x="801439" y="464778"/>
+                  <a:pt x="566212" y="446089"/>
+                </a:cubicBezTo>
+                <a:cubicBezTo>
+                  <a:pt x="330985" y="427400"/>
+                  <a:pt x="266018" y="426592"/>
+                  <a:pt x="0" y="446089"/>
+                </a:cubicBezTo>
+                <a:cubicBezTo>
+                  <a:pt x="21704" y="345261"/>
+                  <a:pt x="-10004" y="137091"/>
+                  <a:pt x="0" y="0"/>
+                </a:cubicBezTo>
+                <a:close/>
+              </a:path>
+              <a:path w="1088870" h="446089" fill="none" extrusionOk="0">
+                <a:moveTo>
+                  <a:pt x="-90736" y="83642"/>
+                </a:moveTo>
+                <a:cubicBezTo>
+                  <a:pt x="-132810" y="82047"/>
+                  <a:pt x="-152345" y="84557"/>
+                  <a:pt x="-181482" y="83642"/>
+                </a:cubicBezTo>
+                <a:cubicBezTo>
+                  <a:pt x="-285686" y="295832"/>
+                  <a:pt x="-451380" y="507829"/>
+                  <a:pt x="-536106" y="676777"/>
+                </a:cubicBezTo>
+                <a:cubicBezTo>
+                  <a:pt x="-620832" y="845725"/>
+                  <a:pt x="-700237" y="953434"/>
+                  <a:pt x="-863452" y="1224287"/>
+                </a:cubicBezTo>
+              </a:path>
+            </a:pathLst>
+          </a:custGeom>
           <a:noFill/>
           <a:ln>
             <a:solidFill>
@@ -6547,6 +6535,25 @@
               </a:schemeClr>
             </a:solidFill>
             <a:tailEnd type="stealth" w="med" len="lg"/>
+            <a:extLst>
+              <a:ext uri="{C807C97D-BFC1-408E-A445-0C87EB9F89A2}">
+                <ask:lineSketchStyleProps xmlns:ask="http://schemas.microsoft.com/office/drawing/2018/sketchyshapes" sd="1801589355">
+                  <a:prstGeom prst="callout2">
+                    <a:avLst>
+                      <a:gd name="adj1" fmla="val 18750"/>
+                      <a:gd name="adj2" fmla="val -8333"/>
+                      <a:gd name="adj3" fmla="val 18750"/>
+                      <a:gd name="adj4" fmla="val -16667"/>
+                      <a:gd name="adj5" fmla="val 274449"/>
+                      <a:gd name="adj6" fmla="val -79298"/>
+                    </a:avLst>
+                  </a:prstGeom>
+                  <ask:type>
+                    <ask:lineSketchFreehand/>
+                  </ask:type>
+                </ask:lineSketchStyleProps>
+              </a:ext>
+            </a:extLst>
           </a:ln>
         </p:spPr>
         <p:style>
@@ -6570,7 +6577,7 @@
           <a:lstStyle/>
           <a:p>
             <a:r>
-              <a:rPr lang="es-ES" dirty="0" err="1">
+              <a:rPr lang="en-US" dirty="0">
                 <a:solidFill>
                   <a:schemeClr val="accent4">
                     <a:lumMod val="75000"/>
@@ -6587,17 +6594,7 @@
                   </a:schemeClr>
                 </a:solidFill>
               </a:rPr>
-              <a:t> </a:t>
-            </a:r>
-            <a:r>
-              <a:rPr lang="es-ES" dirty="0" err="1">
-                <a:solidFill>
-                  <a:schemeClr val="accent4">
-                    <a:lumMod val="75000"/>
-                  </a:schemeClr>
-                </a:solidFill>
-              </a:rPr>
-              <a:t>gte</a:t>
+              <a:t> gate</a:t>
             </a:r>
             <a:endParaRPr lang="en-GB" dirty="0">
               <a:solidFill>
@@ -6609,1335 +6606,10 @@
           </a:p>
         </p:txBody>
       </p:sp>
-      <p:grpSp>
-        <p:nvGrpSpPr>
-          <p:cNvPr id="91" name="Grupo 90">
-            <a:extLst>
-              <a:ext uri="{FF2B5EF4-FFF2-40B4-BE49-F238E27FC236}">
-                <a16:creationId xmlns:a16="http://schemas.microsoft.com/office/drawing/2014/main" id="{2F1B99A0-9908-3142-0498-386DFE39DF0C}"/>
-              </a:ext>
-            </a:extLst>
-          </p:cNvPr>
-          <p:cNvGrpSpPr/>
-          <p:nvPr/>
-        </p:nvGrpSpPr>
-        <p:grpSpPr>
-          <a:xfrm>
-            <a:off x="3929140" y="2907883"/>
-            <a:ext cx="1440000" cy="1236685"/>
-            <a:chOff x="3929140" y="2907883"/>
-            <a:chExt cx="1440000" cy="1236685"/>
-          </a:xfrm>
-        </p:grpSpPr>
-        <p:sp>
-          <p:nvSpPr>
-            <p:cNvPr id="4" name="Rectángulo: esquinas redondeadas 3">
-              <a:extLst>
-                <a:ext uri="{FF2B5EF4-FFF2-40B4-BE49-F238E27FC236}">
-                  <a16:creationId xmlns:a16="http://schemas.microsoft.com/office/drawing/2014/main" id="{CF1437A7-A596-4F07-54E9-499815B6374E}"/>
-                </a:ext>
-              </a:extLst>
-            </p:cNvPr>
-            <p:cNvSpPr/>
-            <p:nvPr/>
-          </p:nvSpPr>
-          <p:spPr>
-            <a:xfrm>
-              <a:off x="3929140" y="2910282"/>
-              <a:ext cx="1440000" cy="1234286"/>
-            </a:xfrm>
-            <a:prstGeom prst="roundRect">
-              <a:avLst>
-                <a:gd name="adj" fmla="val 11953"/>
-              </a:avLst>
-            </a:prstGeom>
-            <a:solidFill>
-              <a:schemeClr val="accent6">
-                <a:lumMod val="20000"/>
-                <a:lumOff val="80000"/>
-              </a:schemeClr>
-            </a:solidFill>
-            <a:ln>
-              <a:solidFill>
-                <a:schemeClr val="accent6">
-                  <a:lumMod val="50000"/>
-                </a:schemeClr>
-              </a:solidFill>
-            </a:ln>
-          </p:spPr>
-          <p:style>
-            <a:lnRef idx="2">
-              <a:schemeClr val="accent1">
-                <a:shade val="15000"/>
-              </a:schemeClr>
-            </a:lnRef>
-            <a:fillRef idx="1">
-              <a:schemeClr val="accent1"/>
-            </a:fillRef>
-            <a:effectRef idx="0">
-              <a:schemeClr val="accent1"/>
-            </a:effectRef>
-            <a:fontRef idx="minor">
-              <a:schemeClr val="lt1"/>
-            </a:fontRef>
-          </p:style>
-          <p:txBody>
-            <a:bodyPr rtlCol="0" anchor="ctr"/>
-            <a:lstStyle/>
-            <a:p>
-              <a:pPr algn="ctr"/>
-              <a:endParaRPr lang="en-GB" dirty="0"/>
-            </a:p>
-          </p:txBody>
-        </p:sp>
-        <p:cxnSp>
-          <p:nvCxnSpPr>
-            <p:cNvPr id="6" name="Conector recto de flecha 5">
-              <a:extLst>
-                <a:ext uri="{FF2B5EF4-FFF2-40B4-BE49-F238E27FC236}">
-                  <a16:creationId xmlns:a16="http://schemas.microsoft.com/office/drawing/2014/main" id="{DF5E304C-2AD3-3799-D362-02D186DCD6C0}"/>
-                </a:ext>
-              </a:extLst>
-            </p:cNvPr>
-            <p:cNvCxnSpPr>
-              <a:cxnSpLocks/>
-              <a:endCxn id="11" idx="2"/>
-            </p:cNvCxnSpPr>
-            <p:nvPr/>
-          </p:nvCxnSpPr>
-          <p:spPr>
-            <a:xfrm>
-              <a:off x="3929140" y="3116434"/>
-              <a:ext cx="374637" cy="0"/>
-            </a:xfrm>
-            <a:prstGeom prst="straightConnector1">
-              <a:avLst/>
-            </a:prstGeom>
-            <a:ln w="12700">
-              <a:solidFill>
-                <a:schemeClr val="tx1"/>
-              </a:solidFill>
-              <a:tailEnd type="stealth" w="sm" len="sm"/>
-            </a:ln>
-          </p:spPr>
-          <p:style>
-            <a:lnRef idx="1">
-              <a:schemeClr val="accent1"/>
-            </a:lnRef>
-            <a:fillRef idx="0">
-              <a:schemeClr val="accent1"/>
-            </a:fillRef>
-            <a:effectRef idx="0">
-              <a:schemeClr val="accent1"/>
-            </a:effectRef>
-            <a:fontRef idx="minor">
-              <a:schemeClr val="tx1"/>
-            </a:fontRef>
-          </p:style>
-        </p:cxnSp>
-        <p:cxnSp>
-          <p:nvCxnSpPr>
-            <p:cNvPr id="9" name="Conector: angular 8">
-              <a:extLst>
-                <a:ext uri="{FF2B5EF4-FFF2-40B4-BE49-F238E27FC236}">
-                  <a16:creationId xmlns:a16="http://schemas.microsoft.com/office/drawing/2014/main" id="{88F6E6D8-FADF-EF60-0389-222F97E41A80}"/>
-                </a:ext>
-              </a:extLst>
-            </p:cNvPr>
-            <p:cNvCxnSpPr>
-              <a:cxnSpLocks/>
-            </p:cNvCxnSpPr>
-            <p:nvPr/>
-          </p:nvCxnSpPr>
-          <p:spPr>
-            <a:xfrm flipV="1">
-              <a:off x="3929140" y="3568568"/>
-              <a:ext cx="1037285" cy="367448"/>
-            </a:xfrm>
-            <a:prstGeom prst="bentConnector3">
-              <a:avLst>
-                <a:gd name="adj1" fmla="val 99907"/>
-              </a:avLst>
-            </a:prstGeom>
-            <a:ln w="12700">
-              <a:solidFill>
-                <a:schemeClr val="tx1"/>
-              </a:solidFill>
-              <a:tailEnd type="stealth" w="sm" len="sm"/>
-            </a:ln>
-          </p:spPr>
-          <p:style>
-            <a:lnRef idx="1">
-              <a:schemeClr val="accent1"/>
-            </a:lnRef>
-            <a:fillRef idx="0">
-              <a:schemeClr val="accent1"/>
-            </a:fillRef>
-            <a:effectRef idx="0">
-              <a:schemeClr val="accent1"/>
-            </a:effectRef>
-            <a:fontRef idx="minor">
-              <a:schemeClr val="tx1"/>
-            </a:fontRef>
-          </p:style>
-        </p:cxnSp>
-        <p:sp>
-          <p:nvSpPr>
-            <p:cNvPr id="11" name="Elipse 10">
-              <a:extLst>
-                <a:ext uri="{FF2B5EF4-FFF2-40B4-BE49-F238E27FC236}">
-                  <a16:creationId xmlns:a16="http://schemas.microsoft.com/office/drawing/2014/main" id="{8331162F-FA64-EC7E-C007-85A2F26DEE97}"/>
-                </a:ext>
-              </a:extLst>
-            </p:cNvPr>
-            <p:cNvSpPr>
-              <a:spLocks noChangeAspect="1"/>
-            </p:cNvSpPr>
-            <p:nvPr/>
-          </p:nvSpPr>
-          <p:spPr>
-            <a:xfrm>
-              <a:off x="4303777" y="3075291"/>
-              <a:ext cx="82286" cy="82286"/>
-            </a:xfrm>
-            <a:prstGeom prst="ellipse">
-              <a:avLst/>
-            </a:prstGeom>
-            <a:solidFill>
-              <a:schemeClr val="bg1"/>
-            </a:solidFill>
-            <a:ln>
-              <a:solidFill>
-                <a:schemeClr val="accent6">
-                  <a:lumMod val="50000"/>
-                </a:schemeClr>
-              </a:solidFill>
-            </a:ln>
-          </p:spPr>
-          <p:style>
-            <a:lnRef idx="2">
-              <a:schemeClr val="accent1">
-                <a:shade val="15000"/>
-              </a:schemeClr>
-            </a:lnRef>
-            <a:fillRef idx="1">
-              <a:schemeClr val="accent1"/>
-            </a:fillRef>
-            <a:effectRef idx="0">
-              <a:schemeClr val="accent1"/>
-            </a:effectRef>
-            <a:fontRef idx="minor">
-              <a:schemeClr val="lt1"/>
-            </a:fontRef>
-          </p:style>
-          <p:txBody>
-            <a:bodyPr rtlCol="0" anchor="ctr"/>
-            <a:lstStyle/>
-            <a:p>
-              <a:pPr algn="ctr"/>
-              <a:r>
-                <a:rPr lang="es-ES" sz="1000" dirty="0">
-                  <a:solidFill>
-                    <a:schemeClr val="tx1"/>
-                  </a:solidFill>
-                </a:rPr>
-                <a:t>X</a:t>
-              </a:r>
-              <a:endParaRPr lang="en-GB" sz="1000" dirty="0">
-                <a:solidFill>
-                  <a:schemeClr val="tx1"/>
-                </a:solidFill>
-              </a:endParaRPr>
-            </a:p>
-          </p:txBody>
-        </p:sp>
-        <p:sp>
-          <p:nvSpPr>
-            <p:cNvPr id="12" name="Elipse 11">
-              <a:extLst>
-                <a:ext uri="{FF2B5EF4-FFF2-40B4-BE49-F238E27FC236}">
-                  <a16:creationId xmlns:a16="http://schemas.microsoft.com/office/drawing/2014/main" id="{CA3CB8CD-9F7E-F230-97C0-D7F372A6968A}"/>
-                </a:ext>
-              </a:extLst>
-            </p:cNvPr>
-            <p:cNvSpPr>
-              <a:spLocks noChangeAspect="1"/>
-            </p:cNvSpPr>
-            <p:nvPr/>
-          </p:nvSpPr>
-          <p:spPr>
-            <a:xfrm>
-              <a:off x="4713929" y="3490225"/>
-              <a:ext cx="82286" cy="82286"/>
-            </a:xfrm>
-            <a:prstGeom prst="ellipse">
-              <a:avLst/>
-            </a:prstGeom>
-            <a:solidFill>
-              <a:schemeClr val="bg1"/>
-            </a:solidFill>
-            <a:ln>
-              <a:solidFill>
-                <a:schemeClr val="accent6">
-                  <a:lumMod val="50000"/>
-                </a:schemeClr>
-              </a:solidFill>
-            </a:ln>
-          </p:spPr>
-          <p:style>
-            <a:lnRef idx="2">
-              <a:schemeClr val="accent1">
-                <a:shade val="15000"/>
-              </a:schemeClr>
-            </a:lnRef>
-            <a:fillRef idx="1">
-              <a:schemeClr val="accent1"/>
-            </a:fillRef>
-            <a:effectRef idx="0">
-              <a:schemeClr val="accent1"/>
-            </a:effectRef>
-            <a:fontRef idx="minor">
-              <a:schemeClr val="lt1"/>
-            </a:fontRef>
-          </p:style>
-          <p:txBody>
-            <a:bodyPr rtlCol="0" anchor="ctr"/>
-            <a:lstStyle/>
-            <a:p>
-              <a:pPr algn="ctr"/>
-              <a:r>
-                <a:rPr lang="es-ES" sz="1000" dirty="0">
-                  <a:solidFill>
-                    <a:schemeClr val="tx1"/>
-                  </a:solidFill>
-                </a:rPr>
-                <a:t>X</a:t>
-              </a:r>
-              <a:endParaRPr lang="en-GB" sz="1000" dirty="0">
-                <a:solidFill>
-                  <a:schemeClr val="tx1"/>
-                </a:solidFill>
-              </a:endParaRPr>
-            </a:p>
-          </p:txBody>
-        </p:sp>
-        <p:sp>
-          <p:nvSpPr>
-            <p:cNvPr id="13" name="Elipse 12">
-              <a:extLst>
-                <a:ext uri="{FF2B5EF4-FFF2-40B4-BE49-F238E27FC236}">
-                  <a16:creationId xmlns:a16="http://schemas.microsoft.com/office/drawing/2014/main" id="{F6EE8B10-8212-F49C-4754-EC5301E898D2}"/>
-                </a:ext>
-              </a:extLst>
-            </p:cNvPr>
-            <p:cNvSpPr>
-              <a:spLocks noChangeAspect="1"/>
-            </p:cNvSpPr>
-            <p:nvPr/>
-          </p:nvSpPr>
-          <p:spPr>
-            <a:xfrm>
-              <a:off x="4716931" y="3076568"/>
-              <a:ext cx="82286" cy="82286"/>
-            </a:xfrm>
-            <a:prstGeom prst="ellipse">
-              <a:avLst/>
-            </a:prstGeom>
-            <a:solidFill>
-              <a:schemeClr val="bg1"/>
-            </a:solidFill>
-            <a:ln>
-              <a:solidFill>
-                <a:schemeClr val="accent6">
-                  <a:lumMod val="50000"/>
-                </a:schemeClr>
-              </a:solidFill>
-            </a:ln>
-          </p:spPr>
-          <p:style>
-            <a:lnRef idx="2">
-              <a:schemeClr val="accent1">
-                <a:shade val="15000"/>
-              </a:schemeClr>
-            </a:lnRef>
-            <a:fillRef idx="1">
-              <a:schemeClr val="accent1"/>
-            </a:fillRef>
-            <a:effectRef idx="0">
-              <a:schemeClr val="accent1"/>
-            </a:effectRef>
-            <a:fontRef idx="minor">
-              <a:schemeClr val="lt1"/>
-            </a:fontRef>
-          </p:style>
-          <p:txBody>
-            <a:bodyPr rtlCol="0" anchor="ctr"/>
-            <a:lstStyle/>
-            <a:p>
-              <a:pPr algn="ctr"/>
-              <a:r>
-                <a:rPr lang="es-ES" sz="1000" dirty="0">
-                  <a:solidFill>
-                    <a:schemeClr val="tx1"/>
-                  </a:solidFill>
-                </a:rPr>
-                <a:t>+</a:t>
-              </a:r>
-              <a:endParaRPr lang="en-GB" sz="1000" dirty="0">
-                <a:solidFill>
-                  <a:schemeClr val="tx1"/>
-                </a:solidFill>
-              </a:endParaRPr>
-            </a:p>
-          </p:txBody>
-        </p:sp>
-        <p:sp>
-          <p:nvSpPr>
-            <p:cNvPr id="14" name="Elipse 13">
-              <a:extLst>
-                <a:ext uri="{FF2B5EF4-FFF2-40B4-BE49-F238E27FC236}">
-                  <a16:creationId xmlns:a16="http://schemas.microsoft.com/office/drawing/2014/main" id="{FF01DD5D-9786-36F2-5529-3C2BDBCC158F}"/>
-                </a:ext>
-              </a:extLst>
-            </p:cNvPr>
-            <p:cNvSpPr>
-              <a:spLocks noChangeAspect="1"/>
-            </p:cNvSpPr>
-            <p:nvPr/>
-          </p:nvSpPr>
-          <p:spPr>
-            <a:xfrm>
-              <a:off x="4925283" y="3486282"/>
-              <a:ext cx="82286" cy="82286"/>
-            </a:xfrm>
-            <a:prstGeom prst="ellipse">
-              <a:avLst/>
-            </a:prstGeom>
-            <a:solidFill>
-              <a:schemeClr val="bg1"/>
-            </a:solidFill>
-            <a:ln>
-              <a:solidFill>
-                <a:schemeClr val="accent6">
-                  <a:lumMod val="50000"/>
-                </a:schemeClr>
-              </a:solidFill>
-            </a:ln>
-          </p:spPr>
-          <p:style>
-            <a:lnRef idx="2">
-              <a:schemeClr val="accent1">
-                <a:shade val="15000"/>
-              </a:schemeClr>
-            </a:lnRef>
-            <a:fillRef idx="1">
-              <a:schemeClr val="accent1"/>
-            </a:fillRef>
-            <a:effectRef idx="0">
-              <a:schemeClr val="accent1"/>
-            </a:effectRef>
-            <a:fontRef idx="minor">
-              <a:schemeClr val="lt1"/>
-            </a:fontRef>
-          </p:style>
-          <p:txBody>
-            <a:bodyPr rtlCol="0" anchor="ctr"/>
-            <a:lstStyle/>
-            <a:p>
-              <a:pPr algn="ctr"/>
-              <a:r>
-                <a:rPr lang="es-ES" sz="1000" dirty="0">
-                  <a:solidFill>
-                    <a:schemeClr val="tx1"/>
-                  </a:solidFill>
-                </a:rPr>
-                <a:t>X</a:t>
-              </a:r>
-              <a:endParaRPr lang="en-GB" sz="1000" dirty="0">
-                <a:solidFill>
-                  <a:schemeClr val="tx1"/>
-                </a:solidFill>
-              </a:endParaRPr>
-            </a:p>
-          </p:txBody>
-        </p:sp>
-        <p:cxnSp>
-          <p:nvCxnSpPr>
-            <p:cNvPr id="18" name="Conector recto de flecha 17">
-              <a:extLst>
-                <a:ext uri="{FF2B5EF4-FFF2-40B4-BE49-F238E27FC236}">
-                  <a16:creationId xmlns:a16="http://schemas.microsoft.com/office/drawing/2014/main" id="{A8D84320-E677-EFC1-C7FA-BCF646B9B4D5}"/>
-                </a:ext>
-              </a:extLst>
-            </p:cNvPr>
-            <p:cNvCxnSpPr>
-              <a:cxnSpLocks/>
-              <a:stCxn id="11" idx="6"/>
-              <a:endCxn id="13" idx="2"/>
-            </p:cNvCxnSpPr>
-            <p:nvPr/>
-          </p:nvCxnSpPr>
-          <p:spPr>
-            <a:xfrm>
-              <a:off x="4386063" y="3116434"/>
-              <a:ext cx="330869" cy="1277"/>
-            </a:xfrm>
-            <a:prstGeom prst="straightConnector1">
-              <a:avLst/>
-            </a:prstGeom>
-            <a:ln w="12700">
-              <a:solidFill>
-                <a:schemeClr val="tx1"/>
-              </a:solidFill>
-              <a:tailEnd type="stealth" w="sm" len="sm"/>
-            </a:ln>
-          </p:spPr>
-          <p:style>
-            <a:lnRef idx="1">
-              <a:schemeClr val="accent1"/>
-            </a:lnRef>
-            <a:fillRef idx="0">
-              <a:schemeClr val="accent1"/>
-            </a:fillRef>
-            <a:effectRef idx="0">
-              <a:schemeClr val="accent1"/>
-            </a:effectRef>
-            <a:fontRef idx="minor">
-              <a:schemeClr val="tx1"/>
-            </a:fontRef>
-          </p:style>
-        </p:cxnSp>
-        <p:cxnSp>
-          <p:nvCxnSpPr>
-            <p:cNvPr id="25" name="Conector: angular 24">
-              <a:extLst>
-                <a:ext uri="{FF2B5EF4-FFF2-40B4-BE49-F238E27FC236}">
-                  <a16:creationId xmlns:a16="http://schemas.microsoft.com/office/drawing/2014/main" id="{B8B7BD59-6167-D52E-EA8A-95FE6EDC9F22}"/>
-                </a:ext>
-              </a:extLst>
-            </p:cNvPr>
-            <p:cNvCxnSpPr>
-              <a:cxnSpLocks/>
-              <a:endCxn id="12" idx="4"/>
-            </p:cNvCxnSpPr>
-            <p:nvPr/>
-          </p:nvCxnSpPr>
-          <p:spPr>
-            <a:xfrm flipV="1">
-              <a:off x="3929140" y="3572511"/>
-              <a:ext cx="825931" cy="363505"/>
-            </a:xfrm>
-            <a:prstGeom prst="bentConnector2">
-              <a:avLst/>
-            </a:prstGeom>
-            <a:ln w="12700">
-              <a:solidFill>
-                <a:schemeClr val="tx1"/>
-              </a:solidFill>
-              <a:tailEnd type="stealth" w="sm" len="sm"/>
-            </a:ln>
-          </p:spPr>
-          <p:style>
-            <a:lnRef idx="1">
-              <a:schemeClr val="accent1"/>
-            </a:lnRef>
-            <a:fillRef idx="0">
-              <a:schemeClr val="accent1"/>
-            </a:fillRef>
-            <a:effectRef idx="0">
-              <a:schemeClr val="accent1"/>
-            </a:effectRef>
-            <a:fontRef idx="minor">
-              <a:schemeClr val="tx1"/>
-            </a:fontRef>
-          </p:style>
-        </p:cxnSp>
-        <p:cxnSp>
-          <p:nvCxnSpPr>
-            <p:cNvPr id="50" name="Conector: angular 49">
-              <a:extLst>
-                <a:ext uri="{FF2B5EF4-FFF2-40B4-BE49-F238E27FC236}">
-                  <a16:creationId xmlns:a16="http://schemas.microsoft.com/office/drawing/2014/main" id="{594BF136-71F0-5C95-9138-69BADC2AD414}"/>
-                </a:ext>
-              </a:extLst>
-            </p:cNvPr>
-            <p:cNvCxnSpPr>
-              <a:cxnSpLocks/>
-              <a:stCxn id="24" idx="3"/>
-              <a:endCxn id="11" idx="4"/>
-            </p:cNvCxnSpPr>
-            <p:nvPr/>
-          </p:nvCxnSpPr>
-          <p:spPr>
-            <a:xfrm flipV="1">
-              <a:off x="4249700" y="3157577"/>
-              <a:ext cx="95220" cy="777350"/>
-            </a:xfrm>
-            <a:prstGeom prst="bentConnector2">
-              <a:avLst/>
-            </a:prstGeom>
-            <a:ln w="12700">
-              <a:solidFill>
-                <a:schemeClr val="tx1"/>
-              </a:solidFill>
-              <a:tailEnd type="stealth" w="sm" len="sm"/>
-            </a:ln>
-          </p:spPr>
-          <p:style>
-            <a:lnRef idx="1">
-              <a:schemeClr val="accent1"/>
-            </a:lnRef>
-            <a:fillRef idx="0">
-              <a:schemeClr val="accent1"/>
-            </a:fillRef>
-            <a:effectRef idx="0">
-              <a:schemeClr val="accent1"/>
-            </a:effectRef>
-            <a:fontRef idx="minor">
-              <a:schemeClr val="tx1"/>
-            </a:fontRef>
-          </p:style>
-        </p:cxnSp>
-        <p:cxnSp>
-          <p:nvCxnSpPr>
-            <p:cNvPr id="61" name="Conector recto de flecha 60">
-              <a:extLst>
-                <a:ext uri="{FF2B5EF4-FFF2-40B4-BE49-F238E27FC236}">
-                  <a16:creationId xmlns:a16="http://schemas.microsoft.com/office/drawing/2014/main" id="{D11C6947-145E-6DA0-C2D8-3A0F726689D2}"/>
-                </a:ext>
-              </a:extLst>
-            </p:cNvPr>
-            <p:cNvCxnSpPr>
-              <a:cxnSpLocks/>
-              <a:stCxn id="12" idx="0"/>
-              <a:endCxn id="13" idx="4"/>
-            </p:cNvCxnSpPr>
-            <p:nvPr/>
-          </p:nvCxnSpPr>
-          <p:spPr>
-            <a:xfrm flipV="1">
-              <a:off x="4755071" y="3158854"/>
-              <a:ext cx="3003" cy="331371"/>
-            </a:xfrm>
-            <a:prstGeom prst="straightConnector1">
-              <a:avLst/>
-            </a:prstGeom>
-            <a:ln w="12700">
-              <a:solidFill>
-                <a:schemeClr val="tx1"/>
-              </a:solidFill>
-              <a:tailEnd type="stealth" w="sm" len="sm"/>
-            </a:ln>
-          </p:spPr>
-          <p:style>
-            <a:lnRef idx="1">
-              <a:schemeClr val="accent1"/>
-            </a:lnRef>
-            <a:fillRef idx="0">
-              <a:schemeClr val="accent1"/>
-            </a:fillRef>
-            <a:effectRef idx="0">
-              <a:schemeClr val="accent1"/>
-            </a:effectRef>
-            <a:fontRef idx="minor">
-              <a:schemeClr val="tx1"/>
-            </a:fontRef>
-          </p:style>
-        </p:cxnSp>
-        <p:cxnSp>
-          <p:nvCxnSpPr>
-            <p:cNvPr id="64" name="Conector recto de flecha 63">
-              <a:extLst>
-                <a:ext uri="{FF2B5EF4-FFF2-40B4-BE49-F238E27FC236}">
-                  <a16:creationId xmlns:a16="http://schemas.microsoft.com/office/drawing/2014/main" id="{989FA8DA-7314-E4C7-00F9-300D819A34A4}"/>
-                </a:ext>
-              </a:extLst>
-            </p:cNvPr>
-            <p:cNvCxnSpPr>
-              <a:cxnSpLocks/>
-              <a:stCxn id="13" idx="6"/>
-            </p:cNvCxnSpPr>
-            <p:nvPr/>
-          </p:nvCxnSpPr>
-          <p:spPr>
-            <a:xfrm flipV="1">
-              <a:off x="4799217" y="3116434"/>
-              <a:ext cx="569923" cy="1277"/>
-            </a:xfrm>
-            <a:prstGeom prst="straightConnector1">
-              <a:avLst/>
-            </a:prstGeom>
-            <a:ln w="12700">
-              <a:solidFill>
-                <a:schemeClr val="tx1"/>
-              </a:solidFill>
-              <a:tailEnd type="none" w="med" len="lg"/>
-            </a:ln>
-          </p:spPr>
-          <p:style>
-            <a:lnRef idx="1">
-              <a:schemeClr val="accent1"/>
-            </a:lnRef>
-            <a:fillRef idx="0">
-              <a:schemeClr val="accent1"/>
-            </a:fillRef>
-            <a:effectRef idx="0">
-              <a:schemeClr val="accent1"/>
-            </a:effectRef>
-            <a:fontRef idx="minor">
-              <a:schemeClr val="tx1"/>
-            </a:fontRef>
-          </p:style>
-        </p:cxnSp>
-        <p:cxnSp>
-          <p:nvCxnSpPr>
-            <p:cNvPr id="72" name="Conector: angular 71">
-              <a:extLst>
-                <a:ext uri="{FF2B5EF4-FFF2-40B4-BE49-F238E27FC236}">
-                  <a16:creationId xmlns:a16="http://schemas.microsoft.com/office/drawing/2014/main" id="{39D38C8C-DFBC-BD7E-3BFB-48048F989251}"/>
-                </a:ext>
-              </a:extLst>
-            </p:cNvPr>
-            <p:cNvCxnSpPr>
-              <a:cxnSpLocks/>
-              <a:stCxn id="13" idx="6"/>
-              <a:endCxn id="14" idx="0"/>
-            </p:cNvCxnSpPr>
-            <p:nvPr/>
-          </p:nvCxnSpPr>
-          <p:spPr>
-            <a:xfrm>
-              <a:off x="4799217" y="3117711"/>
-              <a:ext cx="167208" cy="368571"/>
-            </a:xfrm>
-            <a:prstGeom prst="bentConnector2">
-              <a:avLst/>
-            </a:prstGeom>
-            <a:ln w="12700">
-              <a:solidFill>
-                <a:schemeClr val="tx1"/>
-              </a:solidFill>
-              <a:tailEnd type="stealth" w="sm" len="sm"/>
-            </a:ln>
-          </p:spPr>
-          <p:style>
-            <a:lnRef idx="1">
-              <a:schemeClr val="accent1"/>
-            </a:lnRef>
-            <a:fillRef idx="0">
-              <a:schemeClr val="accent1"/>
-            </a:fillRef>
-            <a:effectRef idx="0">
-              <a:schemeClr val="accent1"/>
-            </a:effectRef>
-            <a:fontRef idx="minor">
-              <a:schemeClr val="tx1"/>
-            </a:fontRef>
-          </p:style>
-        </p:cxnSp>
-        <p:cxnSp>
-          <p:nvCxnSpPr>
-            <p:cNvPr id="80" name="Conector: angular 79">
-              <a:extLst>
-                <a:ext uri="{FF2B5EF4-FFF2-40B4-BE49-F238E27FC236}">
-                  <a16:creationId xmlns:a16="http://schemas.microsoft.com/office/drawing/2014/main" id="{C98ADCAC-EE01-2BB8-6E30-208A3D6438E9}"/>
-                </a:ext>
-              </a:extLst>
-            </p:cNvPr>
-            <p:cNvCxnSpPr>
-              <a:cxnSpLocks/>
-              <a:stCxn id="14" idx="6"/>
-            </p:cNvCxnSpPr>
-            <p:nvPr/>
-          </p:nvCxnSpPr>
-          <p:spPr>
-            <a:xfrm>
-              <a:off x="5007568" y="3527425"/>
-              <a:ext cx="361572" cy="413429"/>
-            </a:xfrm>
-            <a:prstGeom prst="bentConnector3">
-              <a:avLst>
-                <a:gd name="adj1" fmla="val 44648"/>
-              </a:avLst>
-            </a:prstGeom>
-            <a:ln w="12700">
-              <a:solidFill>
-                <a:schemeClr val="tx1"/>
-              </a:solidFill>
-              <a:tailEnd type="none" w="med" len="lg"/>
-            </a:ln>
-          </p:spPr>
-          <p:style>
-            <a:lnRef idx="1">
-              <a:schemeClr val="accent1"/>
-            </a:lnRef>
-            <a:fillRef idx="0">
-              <a:schemeClr val="accent1"/>
-            </a:fillRef>
-            <a:effectRef idx="0">
-              <a:schemeClr val="accent1"/>
-            </a:effectRef>
-            <a:fontRef idx="minor">
-              <a:schemeClr val="tx1"/>
-            </a:fontRef>
-          </p:style>
-        </p:cxnSp>
-        <p:sp>
-          <p:nvSpPr>
-            <p:cNvPr id="24" name="Rectángulo 23">
-              <a:extLst>
-                <a:ext uri="{FF2B5EF4-FFF2-40B4-BE49-F238E27FC236}">
-                  <a16:creationId xmlns:a16="http://schemas.microsoft.com/office/drawing/2014/main" id="{E477D1BE-E34C-F868-DAF8-59338C141568}"/>
-                </a:ext>
-              </a:extLst>
-            </p:cNvPr>
-            <p:cNvSpPr/>
-            <p:nvPr/>
-          </p:nvSpPr>
-          <p:spPr>
-            <a:xfrm>
-              <a:off x="4217640" y="3850288"/>
-              <a:ext cx="32060" cy="169277"/>
-            </a:xfrm>
-            <a:prstGeom prst="rect">
-              <a:avLst/>
-            </a:prstGeom>
-            <a:solidFill>
-              <a:schemeClr val="accent6">
-                <a:lumMod val="20000"/>
-                <a:lumOff val="80000"/>
-              </a:schemeClr>
-            </a:solidFill>
-            <a:ln>
-              <a:noFill/>
-            </a:ln>
-          </p:spPr>
-          <p:style>
-            <a:lnRef idx="2">
-              <a:schemeClr val="accent1">
-                <a:shade val="15000"/>
-              </a:schemeClr>
-            </a:lnRef>
-            <a:fillRef idx="1">
-              <a:schemeClr val="accent1"/>
-            </a:fillRef>
-            <a:effectRef idx="0">
-              <a:schemeClr val="accent1"/>
-            </a:effectRef>
-            <a:fontRef idx="minor">
-              <a:schemeClr val="lt1"/>
-            </a:fontRef>
-          </p:style>
-          <p:txBody>
-            <a:bodyPr wrap="none" lIns="0" tIns="0" rIns="0" bIns="0" rtlCol="0" anchor="ctr">
-              <a:spAutoFit/>
-            </a:bodyPr>
-            <a:lstStyle/>
-            <a:p>
-              <a:pPr algn="ctr"/>
-              <a:r>
-                <a:rPr lang="es-ES" sz="1100" dirty="0">
-                  <a:solidFill>
-                    <a:schemeClr val="tx1"/>
-                  </a:solidFill>
-                </a:rPr>
-                <a:t> </a:t>
-              </a:r>
-              <a:endParaRPr lang="en-GB" sz="1100" baseline="-25000" dirty="0">
-                <a:solidFill>
-                  <a:schemeClr val="tx1"/>
-                </a:solidFill>
-              </a:endParaRPr>
-            </a:p>
-          </p:txBody>
-        </p:sp>
-        <p:sp>
-          <p:nvSpPr>
-            <p:cNvPr id="42" name="Rectángulo 41">
-              <a:extLst>
-                <a:ext uri="{FF2B5EF4-FFF2-40B4-BE49-F238E27FC236}">
-                  <a16:creationId xmlns:a16="http://schemas.microsoft.com/office/drawing/2014/main" id="{17329C10-3515-240F-2F12-3E85B4EBE4F2}"/>
-                </a:ext>
-              </a:extLst>
-            </p:cNvPr>
-            <p:cNvSpPr/>
-            <p:nvPr/>
-          </p:nvSpPr>
-          <p:spPr>
-            <a:xfrm>
-              <a:off x="4624099" y="3647101"/>
-              <a:ext cx="261290" cy="169277"/>
-            </a:xfrm>
-            <a:prstGeom prst="rect">
-              <a:avLst/>
-            </a:prstGeom>
-            <a:solidFill>
-              <a:schemeClr val="accent6">
-                <a:lumMod val="20000"/>
-                <a:lumOff val="80000"/>
-              </a:schemeClr>
-            </a:solidFill>
-            <a:ln>
-              <a:noFill/>
-            </a:ln>
-          </p:spPr>
-          <p:style>
-            <a:lnRef idx="2">
-              <a:schemeClr val="accent1">
-                <a:shade val="15000"/>
-              </a:schemeClr>
-            </a:lnRef>
-            <a:fillRef idx="1">
-              <a:schemeClr val="accent1"/>
-            </a:fillRef>
-            <a:effectRef idx="0">
-              <a:schemeClr val="accent1"/>
-            </a:effectRef>
-            <a:fontRef idx="minor">
-              <a:schemeClr val="lt1"/>
-            </a:fontRef>
-          </p:style>
-          <p:txBody>
-            <a:bodyPr wrap="none" lIns="0" tIns="0" rIns="0" bIns="0" rtlCol="0" anchor="ctr">
-              <a:spAutoFit/>
-            </a:bodyPr>
-            <a:lstStyle/>
-            <a:p>
-              <a:pPr algn="ctr"/>
-              <a:r>
-                <a:rPr lang="es-ES" sz="1100" dirty="0" err="1">
-                  <a:solidFill>
-                    <a:schemeClr val="tx1"/>
-                  </a:solidFill>
-                </a:rPr>
-                <a:t>tanh</a:t>
-              </a:r>
-              <a:endParaRPr lang="en-GB" sz="1100" dirty="0">
-                <a:solidFill>
-                  <a:schemeClr val="tx1"/>
-                </a:solidFill>
-              </a:endParaRPr>
-            </a:p>
-          </p:txBody>
-        </p:sp>
-        <p:sp>
-          <p:nvSpPr>
-            <p:cNvPr id="43" name="Rectángulo 42">
-              <a:extLst>
-                <a:ext uri="{FF2B5EF4-FFF2-40B4-BE49-F238E27FC236}">
-                  <a16:creationId xmlns:a16="http://schemas.microsoft.com/office/drawing/2014/main" id="{60046A8A-0BDA-D7EF-77BC-98CA3E2B7664}"/>
-                </a:ext>
-              </a:extLst>
-            </p:cNvPr>
-            <p:cNvSpPr/>
-            <p:nvPr/>
-          </p:nvSpPr>
-          <p:spPr>
-            <a:xfrm>
-              <a:off x="4931960" y="3654795"/>
-              <a:ext cx="68930" cy="153888"/>
-            </a:xfrm>
-            <a:prstGeom prst="rect">
-              <a:avLst/>
-            </a:prstGeom>
-            <a:solidFill>
-              <a:schemeClr val="accent6">
-                <a:lumMod val="20000"/>
-                <a:lumOff val="80000"/>
-              </a:schemeClr>
-            </a:solidFill>
-            <a:ln>
-              <a:noFill/>
-            </a:ln>
-          </p:spPr>
-          <p:style>
-            <a:lnRef idx="2">
-              <a:schemeClr val="accent1">
-                <a:shade val="15000"/>
-              </a:schemeClr>
-            </a:lnRef>
-            <a:fillRef idx="1">
-              <a:schemeClr val="accent1"/>
-            </a:fillRef>
-            <a:effectRef idx="0">
-              <a:schemeClr val="accent1"/>
-            </a:effectRef>
-            <a:fontRef idx="minor">
-              <a:schemeClr val="lt1"/>
-            </a:fontRef>
-          </p:style>
-          <p:txBody>
-            <a:bodyPr wrap="none" lIns="0" tIns="0" rIns="0" bIns="0" rtlCol="0" anchor="ctr">
-              <a:spAutoFit/>
-            </a:bodyPr>
-            <a:lstStyle/>
-            <a:p>
-              <a:pPr algn="ctr"/>
-              <a:r>
-                <a:rPr lang="el-GR" sz="1000" dirty="0">
-                  <a:solidFill>
-                    <a:schemeClr val="tx1"/>
-                  </a:solidFill>
-                </a:rPr>
-                <a:t>σ</a:t>
-              </a:r>
-              <a:endParaRPr lang="en-GB" sz="1000" dirty="0">
-                <a:solidFill>
-                  <a:schemeClr val="tx1"/>
-                </a:solidFill>
-              </a:endParaRPr>
-            </a:p>
-          </p:txBody>
-        </p:sp>
-        <p:sp>
-          <p:nvSpPr>
-            <p:cNvPr id="44" name="Rectángulo 43">
-              <a:extLst>
-                <a:ext uri="{FF2B5EF4-FFF2-40B4-BE49-F238E27FC236}">
-                  <a16:creationId xmlns:a16="http://schemas.microsoft.com/office/drawing/2014/main" id="{280CD397-4747-C635-4423-E406E1D831F4}"/>
-                </a:ext>
-              </a:extLst>
-            </p:cNvPr>
-            <p:cNvSpPr/>
-            <p:nvPr/>
-          </p:nvSpPr>
-          <p:spPr>
-            <a:xfrm>
-              <a:off x="4835781" y="3228188"/>
-              <a:ext cx="261290" cy="169277"/>
-            </a:xfrm>
-            <a:prstGeom prst="rect">
-              <a:avLst/>
-            </a:prstGeom>
-            <a:solidFill>
-              <a:schemeClr val="accent6">
-                <a:lumMod val="20000"/>
-                <a:lumOff val="80000"/>
-              </a:schemeClr>
-            </a:solidFill>
-            <a:ln>
-              <a:noFill/>
-            </a:ln>
-          </p:spPr>
-          <p:style>
-            <a:lnRef idx="2">
-              <a:schemeClr val="accent1">
-                <a:shade val="15000"/>
-              </a:schemeClr>
-            </a:lnRef>
-            <a:fillRef idx="1">
-              <a:schemeClr val="accent1"/>
-            </a:fillRef>
-            <a:effectRef idx="0">
-              <a:schemeClr val="accent1"/>
-            </a:effectRef>
-            <a:fontRef idx="minor">
-              <a:schemeClr val="lt1"/>
-            </a:fontRef>
-          </p:style>
-          <p:txBody>
-            <a:bodyPr wrap="none" lIns="0" tIns="0" rIns="0" bIns="0" rtlCol="0" anchor="ctr">
-              <a:spAutoFit/>
-            </a:bodyPr>
-            <a:lstStyle/>
-            <a:p>
-              <a:pPr algn="ctr"/>
-              <a:r>
-                <a:rPr lang="es-ES" sz="1100" dirty="0" err="1">
-                  <a:solidFill>
-                    <a:schemeClr val="tx1"/>
-                  </a:solidFill>
-                </a:rPr>
-                <a:t>tanh</a:t>
-              </a:r>
-              <a:endParaRPr lang="en-GB" sz="1100" dirty="0">
-                <a:solidFill>
-                  <a:schemeClr val="tx1"/>
-                </a:solidFill>
-              </a:endParaRPr>
-            </a:p>
-          </p:txBody>
-        </p:sp>
-        <p:cxnSp>
-          <p:nvCxnSpPr>
-            <p:cNvPr id="74" name="Conector: angular 73">
-              <a:extLst>
-                <a:ext uri="{FF2B5EF4-FFF2-40B4-BE49-F238E27FC236}">
-                  <a16:creationId xmlns:a16="http://schemas.microsoft.com/office/drawing/2014/main" id="{DF6F2063-03CA-D525-70EC-6EF6371A777E}"/>
-                </a:ext>
-              </a:extLst>
-            </p:cNvPr>
-            <p:cNvCxnSpPr>
-              <a:cxnSpLocks/>
-              <a:stCxn id="14" idx="6"/>
-            </p:cNvCxnSpPr>
-            <p:nvPr/>
-          </p:nvCxnSpPr>
-          <p:spPr>
-            <a:xfrm>
-              <a:off x="5007569" y="3527425"/>
-              <a:ext cx="161331" cy="617143"/>
-            </a:xfrm>
-            <a:prstGeom prst="bentConnector2">
-              <a:avLst/>
-            </a:prstGeom>
-            <a:ln w="12700">
-              <a:solidFill>
-                <a:schemeClr val="tx1"/>
-              </a:solidFill>
-              <a:tailEnd type="none" w="med" len="lg"/>
-            </a:ln>
-          </p:spPr>
-          <p:style>
-            <a:lnRef idx="1">
-              <a:schemeClr val="accent1"/>
-            </a:lnRef>
-            <a:fillRef idx="0">
-              <a:schemeClr val="accent1"/>
-            </a:fillRef>
-            <a:effectRef idx="0">
-              <a:schemeClr val="accent1"/>
-            </a:effectRef>
-            <a:fontRef idx="minor">
-              <a:schemeClr val="tx1"/>
-            </a:fontRef>
-          </p:style>
-        </p:cxnSp>
-        <p:cxnSp>
-          <p:nvCxnSpPr>
-            <p:cNvPr id="82" name="Conector: angular 81">
-              <a:extLst>
-                <a:ext uri="{FF2B5EF4-FFF2-40B4-BE49-F238E27FC236}">
-                  <a16:creationId xmlns:a16="http://schemas.microsoft.com/office/drawing/2014/main" id="{7960F2C7-1FC2-0087-3341-9D1233F6EECF}"/>
-                </a:ext>
-              </a:extLst>
-            </p:cNvPr>
-            <p:cNvCxnSpPr>
-              <a:cxnSpLocks/>
-              <a:endCxn id="24" idx="1"/>
-            </p:cNvCxnSpPr>
-            <p:nvPr/>
-          </p:nvCxnSpPr>
-          <p:spPr>
-            <a:xfrm rot="16200000" flipH="1">
-              <a:off x="3671065" y="3388351"/>
-              <a:ext cx="1027043" cy="66108"/>
-            </a:xfrm>
-            <a:prstGeom prst="bentConnector2">
-              <a:avLst/>
-            </a:prstGeom>
-            <a:ln w="12700">
-              <a:solidFill>
-                <a:schemeClr val="tx1"/>
-              </a:solidFill>
-              <a:tailEnd type="none" w="sm" len="sm"/>
-            </a:ln>
-          </p:spPr>
-          <p:style>
-            <a:lnRef idx="1">
-              <a:schemeClr val="accent1"/>
-            </a:lnRef>
-            <a:fillRef idx="0">
-              <a:schemeClr val="accent1"/>
-            </a:fillRef>
-            <a:effectRef idx="0">
-              <a:schemeClr val="accent1"/>
-            </a:effectRef>
-            <a:fontRef idx="minor">
-              <a:schemeClr val="tx1"/>
-            </a:fontRef>
-          </p:style>
-        </p:cxnSp>
-        <p:cxnSp>
-          <p:nvCxnSpPr>
-            <p:cNvPr id="46" name="Conector: angular 45">
-              <a:extLst>
-                <a:ext uri="{FF2B5EF4-FFF2-40B4-BE49-F238E27FC236}">
-                  <a16:creationId xmlns:a16="http://schemas.microsoft.com/office/drawing/2014/main" id="{4CFB91D7-C914-4AD9-712C-539CC98D96E5}"/>
-                </a:ext>
-              </a:extLst>
-            </p:cNvPr>
-            <p:cNvCxnSpPr>
-              <a:cxnSpLocks/>
-              <a:endCxn id="12" idx="2"/>
-            </p:cNvCxnSpPr>
-            <p:nvPr/>
-          </p:nvCxnSpPr>
-          <p:spPr>
-            <a:xfrm flipV="1">
-              <a:off x="3929140" y="3531368"/>
-              <a:ext cx="784789" cy="404648"/>
-            </a:xfrm>
-            <a:prstGeom prst="bentConnector3">
-              <a:avLst>
-                <a:gd name="adj1" fmla="val 78667"/>
-              </a:avLst>
-            </a:prstGeom>
-            <a:ln w="12700">
-              <a:solidFill>
-                <a:schemeClr val="tx1"/>
-              </a:solidFill>
-              <a:tailEnd type="stealth" w="sm" len="sm"/>
-            </a:ln>
-          </p:spPr>
-          <p:style>
-            <a:lnRef idx="1">
-              <a:schemeClr val="accent1"/>
-            </a:lnRef>
-            <a:fillRef idx="0">
-              <a:schemeClr val="accent1"/>
-            </a:fillRef>
-            <a:effectRef idx="0">
-              <a:schemeClr val="accent1"/>
-            </a:effectRef>
-            <a:fontRef idx="minor">
-              <a:schemeClr val="tx1"/>
-            </a:fontRef>
-          </p:style>
-        </p:cxnSp>
-        <p:sp>
-          <p:nvSpPr>
-            <p:cNvPr id="41" name="Rectángulo 40">
-              <a:extLst>
-                <a:ext uri="{FF2B5EF4-FFF2-40B4-BE49-F238E27FC236}">
-                  <a16:creationId xmlns:a16="http://schemas.microsoft.com/office/drawing/2014/main" id="{6BF8DABC-0560-FDCD-1E18-56314BB886AE}"/>
-                </a:ext>
-              </a:extLst>
-            </p:cNvPr>
-            <p:cNvSpPr/>
-            <p:nvPr/>
-          </p:nvSpPr>
-          <p:spPr>
-            <a:xfrm>
-              <a:off x="4513101" y="3654795"/>
-              <a:ext cx="68930" cy="153888"/>
-            </a:xfrm>
-            <a:prstGeom prst="rect">
-              <a:avLst/>
-            </a:prstGeom>
-            <a:solidFill>
-              <a:schemeClr val="accent6">
-                <a:lumMod val="20000"/>
-                <a:lumOff val="80000"/>
-              </a:schemeClr>
-            </a:solidFill>
-            <a:ln>
-              <a:noFill/>
-            </a:ln>
-          </p:spPr>
-          <p:style>
-            <a:lnRef idx="2">
-              <a:schemeClr val="accent1">
-                <a:shade val="15000"/>
-              </a:schemeClr>
-            </a:lnRef>
-            <a:fillRef idx="1">
-              <a:schemeClr val="accent1"/>
-            </a:fillRef>
-            <a:effectRef idx="0">
-              <a:schemeClr val="accent1"/>
-            </a:effectRef>
-            <a:fontRef idx="minor">
-              <a:schemeClr val="lt1"/>
-            </a:fontRef>
-          </p:style>
-          <p:txBody>
-            <a:bodyPr wrap="none" lIns="0" tIns="0" rIns="0" bIns="0" rtlCol="0" anchor="ctr">
-              <a:spAutoFit/>
-            </a:bodyPr>
-            <a:lstStyle/>
-            <a:p>
-              <a:pPr algn="ctr"/>
-              <a:r>
-                <a:rPr lang="el-GR" sz="1000" dirty="0">
-                  <a:solidFill>
-                    <a:schemeClr val="tx1"/>
-                  </a:solidFill>
-                </a:rPr>
-                <a:t>σ</a:t>
-              </a:r>
-              <a:endParaRPr lang="en-GB" sz="1000" dirty="0">
-                <a:solidFill>
-                  <a:schemeClr val="tx1"/>
-                </a:solidFill>
-              </a:endParaRPr>
-            </a:p>
-          </p:txBody>
-        </p:sp>
-        <p:sp>
-          <p:nvSpPr>
-            <p:cNvPr id="90" name="Rectángulo 89">
-              <a:extLst>
-                <a:ext uri="{FF2B5EF4-FFF2-40B4-BE49-F238E27FC236}">
-                  <a16:creationId xmlns:a16="http://schemas.microsoft.com/office/drawing/2014/main" id="{C87EA8B1-69F9-4883-B492-2A901E4E14CC}"/>
-                </a:ext>
-              </a:extLst>
-            </p:cNvPr>
-            <p:cNvSpPr/>
-            <p:nvPr/>
-          </p:nvSpPr>
-          <p:spPr>
-            <a:xfrm>
-              <a:off x="4310456" y="3647101"/>
-              <a:ext cx="68930" cy="153888"/>
-            </a:xfrm>
-            <a:prstGeom prst="rect">
-              <a:avLst/>
-            </a:prstGeom>
-            <a:solidFill>
-              <a:schemeClr val="accent6">
-                <a:lumMod val="20000"/>
-                <a:lumOff val="80000"/>
-              </a:schemeClr>
-            </a:solidFill>
-            <a:ln>
-              <a:noFill/>
-            </a:ln>
-          </p:spPr>
-          <p:style>
-            <a:lnRef idx="2">
-              <a:schemeClr val="accent1">
-                <a:shade val="15000"/>
-              </a:schemeClr>
-            </a:lnRef>
-            <a:fillRef idx="1">
-              <a:schemeClr val="accent1"/>
-            </a:fillRef>
-            <a:effectRef idx="0">
-              <a:schemeClr val="accent1"/>
-            </a:effectRef>
-            <a:fontRef idx="minor">
-              <a:schemeClr val="lt1"/>
-            </a:fontRef>
-          </p:style>
-          <p:txBody>
-            <a:bodyPr wrap="none" lIns="0" tIns="0" rIns="0" bIns="0" rtlCol="0" anchor="ctr">
-              <a:spAutoFit/>
-            </a:bodyPr>
-            <a:lstStyle/>
-            <a:p>
-              <a:pPr algn="ctr"/>
-              <a:r>
-                <a:rPr lang="el-GR" sz="1000" dirty="0">
-                  <a:solidFill>
-                    <a:schemeClr val="tx1"/>
-                  </a:solidFill>
-                </a:rPr>
-                <a:t>σ</a:t>
-              </a:r>
-              <a:endParaRPr lang="en-GB" sz="1000" dirty="0">
-                <a:solidFill>
-                  <a:schemeClr val="tx1"/>
-                </a:solidFill>
-              </a:endParaRPr>
-            </a:p>
-          </p:txBody>
-        </p:sp>
-      </p:grpSp>
     </p:spTree>
     <p:extLst>
       <p:ext uri="{BB962C8B-B14F-4D97-AF65-F5344CB8AC3E}">
-        <p14:creationId xmlns:p14="http://schemas.microsoft.com/office/powerpoint/2010/main" val="3351513696"/>
+        <p14:creationId xmlns:p14="http://schemas.microsoft.com/office/powerpoint/2010/main" val="3684884756"/>
       </p:ext>
     </p:extLst>
   </p:cSld>
